--- a/ゲーム科3年/00_前期/ゲームエンジンⅤ/14_ナイアガラエフェクトの基礎.pptx
+++ b/ゲーム科3年/00_前期/ゲームエンジンⅤ/14_ナイアガラエフェクトの基礎.pptx
@@ -277,7 +277,7 @@
           <a:p>
             <a:fld id="{E9CC885B-4903-4D54-9A93-00025F12DED9}" type="datetimeFigureOut">
               <a:rPr kumimoji="1" lang="ja-JP" altLang="en-US" smtClean="0"/>
-              <a:t>2025/4/25</a:t>
+              <a:t>2026/3/26</a:t>
             </a:fld>
             <a:endParaRPr kumimoji="1" lang="ja-JP" altLang="en-US"/>
           </a:p>
@@ -507,7 +507,7 @@
           <a:p>
             <a:fld id="{E9CC885B-4903-4D54-9A93-00025F12DED9}" type="datetimeFigureOut">
               <a:rPr kumimoji="1" lang="ja-JP" altLang="en-US" smtClean="0"/>
-              <a:t>2025/4/25</a:t>
+              <a:t>2026/3/26</a:t>
             </a:fld>
             <a:endParaRPr kumimoji="1" lang="ja-JP" altLang="en-US"/>
           </a:p>
@@ -747,7 +747,7 @@
           <a:p>
             <a:fld id="{E9CC885B-4903-4D54-9A93-00025F12DED9}" type="datetimeFigureOut">
               <a:rPr kumimoji="1" lang="ja-JP" altLang="en-US" smtClean="0"/>
-              <a:t>2025/4/25</a:t>
+              <a:t>2026/3/26</a:t>
             </a:fld>
             <a:endParaRPr kumimoji="1" lang="ja-JP" altLang="en-US"/>
           </a:p>
@@ -977,7 +977,7 @@
           <a:p>
             <a:fld id="{E9CC885B-4903-4D54-9A93-00025F12DED9}" type="datetimeFigureOut">
               <a:rPr kumimoji="1" lang="ja-JP" altLang="en-US" smtClean="0"/>
-              <a:t>2025/4/25</a:t>
+              <a:t>2026/3/26</a:t>
             </a:fld>
             <a:endParaRPr kumimoji="1" lang="ja-JP" altLang="en-US"/>
           </a:p>
@@ -1252,7 +1252,7 @@
           <a:p>
             <a:fld id="{E9CC885B-4903-4D54-9A93-00025F12DED9}" type="datetimeFigureOut">
               <a:rPr kumimoji="1" lang="ja-JP" altLang="en-US" smtClean="0"/>
-              <a:t>2025/4/25</a:t>
+              <a:t>2026/3/26</a:t>
             </a:fld>
             <a:endParaRPr kumimoji="1" lang="ja-JP" altLang="en-US"/>
           </a:p>
@@ -1581,7 +1581,7 @@
           <a:p>
             <a:fld id="{E9CC885B-4903-4D54-9A93-00025F12DED9}" type="datetimeFigureOut">
               <a:rPr kumimoji="1" lang="ja-JP" altLang="en-US" smtClean="0"/>
-              <a:t>2025/4/25</a:t>
+              <a:t>2026/3/26</a:t>
             </a:fld>
             <a:endParaRPr kumimoji="1" lang="ja-JP" altLang="en-US"/>
           </a:p>
@@ -2057,7 +2057,7 @@
           <a:p>
             <a:fld id="{E9CC885B-4903-4D54-9A93-00025F12DED9}" type="datetimeFigureOut">
               <a:rPr kumimoji="1" lang="ja-JP" altLang="en-US" smtClean="0"/>
-              <a:t>2025/4/25</a:t>
+              <a:t>2026/3/26</a:t>
             </a:fld>
             <a:endParaRPr kumimoji="1" lang="ja-JP" altLang="en-US"/>
           </a:p>
@@ -2198,7 +2198,7 @@
           <a:p>
             <a:fld id="{E9CC885B-4903-4D54-9A93-00025F12DED9}" type="datetimeFigureOut">
               <a:rPr kumimoji="1" lang="ja-JP" altLang="en-US" smtClean="0"/>
-              <a:t>2025/4/25</a:t>
+              <a:t>2026/3/26</a:t>
             </a:fld>
             <a:endParaRPr kumimoji="1" lang="ja-JP" altLang="en-US"/>
           </a:p>
@@ -2311,7 +2311,7 @@
           <a:p>
             <a:fld id="{E9CC885B-4903-4D54-9A93-00025F12DED9}" type="datetimeFigureOut">
               <a:rPr kumimoji="1" lang="ja-JP" altLang="en-US" smtClean="0"/>
-              <a:t>2025/4/25</a:t>
+              <a:t>2026/3/26</a:t>
             </a:fld>
             <a:endParaRPr kumimoji="1" lang="ja-JP" altLang="en-US"/>
           </a:p>
@@ -2654,7 +2654,7 @@
           <a:p>
             <a:fld id="{E9CC885B-4903-4D54-9A93-00025F12DED9}" type="datetimeFigureOut">
               <a:rPr kumimoji="1" lang="ja-JP" altLang="en-US" smtClean="0"/>
-              <a:t>2025/4/25</a:t>
+              <a:t>2026/3/26</a:t>
             </a:fld>
             <a:endParaRPr kumimoji="1" lang="ja-JP" altLang="en-US"/>
           </a:p>
@@ -2942,7 +2942,7 @@
           <a:p>
             <a:fld id="{E9CC885B-4903-4D54-9A93-00025F12DED9}" type="datetimeFigureOut">
               <a:rPr kumimoji="1" lang="ja-JP" altLang="en-US" smtClean="0"/>
-              <a:t>2025/4/25</a:t>
+              <a:t>2026/3/26</a:t>
             </a:fld>
             <a:endParaRPr kumimoji="1" lang="ja-JP" altLang="en-US"/>
           </a:p>
@@ -3215,7 +3215,7 @@
           <a:p>
             <a:fld id="{E9CC885B-4903-4D54-9A93-00025F12DED9}" type="datetimeFigureOut">
               <a:rPr kumimoji="1" lang="ja-JP" altLang="en-US" smtClean="0"/>
-              <a:t>2025/4/25</a:t>
+              <a:t>2026/3/26</a:t>
             </a:fld>
             <a:endParaRPr kumimoji="1" lang="ja-JP" altLang="en-US"/>
           </a:p>
@@ -4614,10 +4614,18 @@
           </a:p>
           <a:p>
             <a:r>
-              <a:rPr kumimoji="1" lang="ja-JP" altLang="en-US" sz="2400" dirty="0"/>
+              <a:rPr kumimoji="1" lang="ja-JP" altLang="en-US" sz="2400" b="1" dirty="0">
+                <a:solidFill>
+                  <a:srgbClr val="FF0000"/>
+                </a:solidFill>
+              </a:rPr>
               <a:t>■エミッタの更新</a:t>
             </a:r>
-            <a:endParaRPr kumimoji="1" lang="en-US" altLang="ja-JP" sz="2400" dirty="0"/>
+            <a:endParaRPr kumimoji="1" lang="en-US" altLang="ja-JP" sz="2400" b="1" dirty="0">
+              <a:solidFill>
+                <a:srgbClr val="FF0000"/>
+              </a:solidFill>
+            </a:endParaRPr>
           </a:p>
           <a:p>
             <a:r>
@@ -4641,10 +4649,18 @@
           </a:p>
           <a:p>
             <a:r>
-              <a:rPr lang="ja-JP" altLang="en-US" sz="2400" dirty="0"/>
+              <a:rPr lang="ja-JP" altLang="en-US" sz="2400" b="1" dirty="0">
+                <a:solidFill>
+                  <a:srgbClr val="FF0000"/>
+                </a:solidFill>
+              </a:rPr>
               <a:t>■パーティクルのスポーン</a:t>
             </a:r>
-            <a:endParaRPr lang="en-US" altLang="ja-JP" sz="2400" dirty="0"/>
+            <a:endParaRPr lang="en-US" altLang="ja-JP" sz="2400" b="1" dirty="0">
+              <a:solidFill>
+                <a:srgbClr val="FF0000"/>
+              </a:solidFill>
+            </a:endParaRPr>
           </a:p>
           <a:p>
             <a:r>
@@ -6708,15 +6724,7 @@
                   <a:srgbClr val="FF0000"/>
                 </a:solidFill>
               </a:rPr>
-              <a:t>Shape </a:t>
-            </a:r>
-            <a:r>
-              <a:rPr lang="en-US" altLang="ja-JP" sz="2400" b="1" dirty="0" err="1">
-                <a:solidFill>
-                  <a:srgbClr val="FF0000"/>
-                </a:solidFill>
-              </a:rPr>
-              <a:t>Locaton</a:t>
+              <a:t>Shape Location</a:t>
             </a:r>
             <a:r>
               <a:rPr lang="ja-JP" altLang="en-US" sz="2400" dirty="0"/>
